--- a/docs/apresentacoes/Mudanca_Radical_Metodologia_SAREL_v2.pptx
+++ b/docs/apresentacoes/Mudanca_Radical_Metodologia_SAREL_v2.pptx
@@ -6201,37 +6201,52 @@
               </a:defRPr>
             </a:pPr>
             <a:r>
-              <a:t>► FATOR R (EROSIVIDADE DA CHUVA) — Decisão D13 (Rufino et al., 1993; Waltrick et al., 2015):</a:t>
-            </a:r>
-          </a:p>
-          <a:p>
-            <a:pPr>
-              <a:spcAft>
-                <a:spcPts val="300"/>
-              </a:spcAft>
-              <a:defRPr sz="900">
-                <a:solidFill>
-                  <a:srgbClr val="334155"/>
-                </a:solidFill>
-              </a:defRPr>
-            </a:pPr>
-            <a:r>
-              <a:t>•    • Equação regional do Paraná: EI30_m = 107,52 + 46,89 * (p_m^2 / P_anual) sobre CHIRPS 0,05° climatológico.</a:t>
-            </a:r>
-          </a:p>
-          <a:p>
-            <a:pPr>
-              <a:spcAft>
-                <a:spcPts val="300"/>
-              </a:spcAft>
-              <a:defRPr sz="900">
-                <a:solidFill>
-                  <a:srgbClr val="334155"/>
-                </a:solidFill>
-              </a:defRPr>
-            </a:pPr>
-            <a:r>
-              <a:t>•    • Sucedâneo formal declarado do EI30 contínuo de 30 minutos (limitação metodológica expressa).</a:t>
+              <a:t>► FATOR R (EROSIVIDADE DA CHUVA) — Decisão D13 (Waltrick et al., 2015; SBCS-NEPAR 2011; Funk et al., 2015):</a:t>
+            </a:r>
+          </a:p>
+          <a:p>
+            <a:pPr>
+              <a:spcAft>
+                <a:spcPts val="300"/>
+              </a:spcAft>
+              <a:defRPr sz="900">
+                <a:solidFill>
+                  <a:srgbClr val="334155"/>
+                </a:solidFill>
+              </a:defRPr>
+            </a:pPr>
+            <a:r>
+              <a:t>•    • Download real CHIRPS v2.0 mensal (12 meses, 0,05° nativo, Diário F5 validado). Tabela municipal como conferência cruzada.</a:t>
+            </a:r>
+          </a:p>
+          <a:p>
+            <a:pPr>
+              <a:spcAft>
+                <a:spcPts val="300"/>
+              </a:spcAft>
+              <a:defRPr sz="900">
+                <a:solidFill>
+                  <a:srgbClr val="334155"/>
+                </a:solidFill>
+              </a:defRPr>
+            </a:pPr>
+            <a:r>
+              <a:t>•    • Coeficientes a = 107,52 e b = 46,89 desativados por ausência no texto arquivado; R retorna estritamente 'indisponivel' ('insuficiente').</a:t>
+            </a:r>
+          </a:p>
+          <a:p>
+            <a:pPr>
+              <a:spcAft>
+                <a:spcPts val="300"/>
+              </a:spcAft>
+              <a:defRPr sz="900">
+                <a:solidFill>
+                  <a:srgbClr val="334155"/>
+                </a:solidFill>
+              </a:defRPr>
+            </a:pPr>
+            <a:r>
+              <a:t>•    • 0 dos 72 pontos têm perdaSolo calculada (todos os 72 retidos sob Invariante 1), blindando a régua contra a qual o XGBoost será julgado.</a:t>
             </a:r>
           </a:p>
           <a:p>
@@ -6276,22 +6291,22 @@
               </a:defRPr>
             </a:pPr>
             <a:r>
-              <a:t>•    • Algoritmo bidimensional de área de contribuição específica sobre Copernicus DEM GLO-30 nativo de 30 m.</a:t>
-            </a:r>
-          </a:p>
-          <a:p>
-            <a:pPr>
-              <a:spcAft>
-                <a:spcPts val="300"/>
-              </a:spcAft>
-              <a:defRPr sz="900">
-                <a:solidFill>
-                  <a:srgbClr val="334155"/>
-                </a:solidFill>
-              </a:defRPr>
-            </a:pPr>
-            <a:r>
-              <a:t>•    • Expoente m dependente da declividade e fator de rampa S analítico (Eqs. [4-2] a [4-5], pp. 105-107).</a:t>
+              <a:t>•    • Algoritmo 2D Desmet &amp; Govers sobre Copernicus DEM GLO-30 nativo de 30 m.</a:t>
+            </a:r>
+          </a:p>
+          <a:p>
+            <a:pPr>
+              <a:spcAft>
+                <a:spcPts val="300"/>
+              </a:spcAft>
+              <a:defRPr sz="900">
+                <a:solidFill>
+                  <a:srgbClr val="334155"/>
+                </a:solidFill>
+              </a:defRPr>
+            </a:pPr>
+            <a:r>
+              <a:t>•    • Equações [4-1] a [4-5], expoente m, declividade S e conversão métrica de 22,13 m conferidos por OCR neural (RapidOCR) no AH 703.</a:t>
             </a:r>
           </a:p>
           <a:p>
@@ -7694,7 +7709,7 @@
               </a:defRPr>
             </a:pPr>
             <a:r>
-              <a:t>► &lt;b&gt;Invariante 6 — Protocolo Cego com Cegamento Duplo:&lt;/b&gt; Intérpretes de VANT rotulam polígonos através de hashes anônimos (ex.: VANT-BLIND-15840AA020) sem conhecer localização ou estrato.</a:t>
+              <a:t>► &lt;b&gt;Invariante 6 — Protocolo Cego com Cegamento Duplo e Isolamento JEV:&lt;/b&gt; Intérpretes rotulam ortomosaicos VANT sob hashes anônimos. Motores de IA qualitativa (JEV/Heurística Local) são isolados por teste e jamais atingem a RUSLE.</a:t>
             </a:r>
           </a:p>
           <a:p>
@@ -7865,7 +7880,7 @@
               </a:defRPr>
             </a:pPr>
             <a:r>
-              <a:t>Verificação Mecânica Contínua: 54 Suítes de Testes (409 Aprovados)</a:t>
+              <a:t>Verificação Mecânica Contínua: 54 Suítes de Testes (412 Aprovados)</a:t>
             </a:r>
           </a:p>
         </p:txBody>
@@ -8192,7 +8207,7 @@
               </a:defRPr>
             </a:pPr>
             <a:r>
-              <a:t>•    • &lt;b&gt;409 testes unitários e de integração aprovados (409/409)&lt;/b&gt;.</a:t>
+              <a:t>•    • &lt;b&gt;412 testes unitários e de integração aprovados (412/412)&lt;/b&gt;.</a:t>
             </a:r>
           </a:p>
           <a:p>
